--- a/en/slides/23-Computer_Architecture-Verm1_On_The_Cartridge_Store-Lab.pptx
+++ b/en/slides/23-Computer_Architecture-Verm1_On_The_Cartridge_Store-Lab.pptx
@@ -123,42 +123,42 @@
   <p:extLst>
     <p:ext uri="{521415D9-36F7-43E2-AB2F-B90AF26B5E84}">
       <p14:sectionLst xmlns:p14="http://schemas.microsoft.com/office/powerpoint/2010/main">
-        <p14:section name="Opening" id="{87d28289-cdce-bb52-6ff9-e074331ebc0b}">
+        <p14:section name="Opening" id="{8fdb2cb1-9993-65a5-9d2a-a4f45d699a16}">
           <p14:sldIdLst>
             <p14:sldId id="256"/>
             <p14:sldId id="257"/>
           </p14:sldIdLst>
         </p14:section>
-        <p14:section name="Step 1: one source, two cartridges" id="{b2f2ed13-f231-6b85-f270-3441e86111a6}">
+        <p14:section name="Step 1: one source, two cartridges" id="{f4856c33-05cf-feb8-662b-cba99ec3915b}">
           <p14:sldIdLst>
             <p14:sldId id="258"/>
             <p14:sldId id="259"/>
           </p14:sldIdLst>
         </p14:section>
-        <p14:section name="Step 2: an identity" id="{33eabeee-ef8b-744d-8e44-844b96ee6a46}">
+        <p14:section name="Step 2: an identity" id="{902d31ba-3717-1b86-d0d9-78519ed3c656}">
           <p14:sldIdLst>
             <p14:sldId id="260"/>
             <p14:sldId id="261"/>
           </p14:sldIdLst>
         </p14:section>
-        <p14:section name="Step 3: the cartridge carries its papers" id="{7e3237d9-9d6e-2ed7-d4e1-ccad6ed3cf28}">
+        <p14:section name="Step 3: the cartridge carries its papers" id="{734e4f5d-74ad-0660-d648-ecc8028a0b84}">
           <p14:sldIdLst>
             <p14:sldId id="262"/>
             <p14:sldId id="263"/>
           </p14:sldIdLst>
         </p14:section>
-        <p14:section name="Step 4: the bundle" id="{f594bb53-2ee7-fa56-a014-46c222eda3d9}">
+        <p14:section name="Step 4: the bundle" id="{c85a0407-edf1-238b-0ff8-3700944aec67}">
           <p14:sldIdLst>
             <p14:sldId id="264"/>
             <p14:sldId id="265"/>
           </p14:sldIdLst>
         </p14:section>
-        <p14:section name="Step 5: publication" id="{d028a724-7b54-7238-dc4c-9bb0e3b69512}">
+        <p14:section name="Step 5: publication" id="{22914413-44d5-28e4-67a2-4abba40e0c1f}">
           <p14:sldIdLst>
             <p14:sldId id="266"/>
           </p14:sldIdLst>
         </p14:section>
-        <p14:section name="Run it and test it" id="{b86a3d5c-f20d-3b64-fb4a-7a17b70a43a4}">
+        <p14:section name="Run it and test it" id="{44a7e041-6511-86a6-81f6-0b610cd2596d}">
           <p14:sldIdLst>
             <p14:sldId id="267"/>
             <p14:sldId id="268"/>
@@ -167,7 +167,7 @@
             <p14:sldId id="271"/>
           </p14:sldIdLst>
         </p14:section>
-        <p14:section name="Exercises" id="{8f1a3542-d70d-c7de-4a07-2ba953f69ef7}">
+        <p14:section name="Exercises" id="{0e942a9a-cc93-585d-4938-3011aa1fd9bb}">
           <p14:sldIdLst>
             <p14:sldId id="272"/>
           </p14:sldIdLst>
@@ -1652,7 +1652,7 @@
           <a:p>
             <a:r>
               <a:rPr lang="en-US" dirty="0"/>
-              <a:t>The manifest is a JSON file describing the game, whose fields should be read one by one. id is a globally unique name. version consists of three numbers. title is what the player reads. summary is a one-line description for the shelf, description a paragraph. Authors, licence and tags follow. At the end, assets names the icon and architectures states which cartridge file serves which target. The file is created with a text editor in the folder of the game.
+              <a:t>The manifest is a JSON file describing the game; JSON is a plain-text format for structured data, in which each value is written after its name, between braces. Its fields should be read one by one. id is a globally unique name. version consists of three numbers. title is what the player reads. summary is a one-line description for the shelf, description a paragraph. Authors, licence and tags follow. At the end, assets names the icon and architectures states which cartridge file serves which target. The file is created with a text editor in the folder of the game.
 UNDERSTAND NOW: packaging and publishing.
 For the lecturer: Create the file in ~/verm1 with a text editor. The description is cut on the slide. The abi line says which version of the metadata format this is.</a:t>
             </a:r>

--- a/en/slides/23-Computer_Architecture-Verm1_On_The_Cartridge_Store-Lab.pptx
+++ b/en/slides/23-Computer_Architecture-Verm1_On_The_Cartridge_Store-Lab.pptx
@@ -123,42 +123,42 @@
   <p:extLst>
     <p:ext uri="{521415D9-36F7-43E2-AB2F-B90AF26B5E84}">
       <p14:sectionLst xmlns:p14="http://schemas.microsoft.com/office/powerpoint/2010/main">
-        <p14:section name="Opening" id="{8fdb2cb1-9993-65a5-9d2a-a4f45d699a16}">
+        <p14:section name="Opening" id="{aeeae353-8f9d-057a-3d47-cbcafeee3b04}">
           <p14:sldIdLst>
             <p14:sldId id="256"/>
             <p14:sldId id="257"/>
           </p14:sldIdLst>
         </p14:section>
-        <p14:section name="Step 1: one source, two cartridges" id="{f4856c33-05cf-feb8-662b-cba99ec3915b}">
+        <p14:section name="Step 1: one source, two cartridges" id="{05ffda83-9a47-75c2-765f-572e850a1b60}">
           <p14:sldIdLst>
             <p14:sldId id="258"/>
             <p14:sldId id="259"/>
           </p14:sldIdLst>
         </p14:section>
-        <p14:section name="Step 2: an identity" id="{902d31ba-3717-1b86-d0d9-78519ed3c656}">
+        <p14:section name="Step 2: an identity" id="{caa32fd0-2cd7-ee87-c1be-c7a941b90944}">
           <p14:sldIdLst>
             <p14:sldId id="260"/>
             <p14:sldId id="261"/>
           </p14:sldIdLst>
         </p14:section>
-        <p14:section name="Step 3: the cartridge carries its papers" id="{734e4f5d-74ad-0660-d648-ecc8028a0b84}">
+        <p14:section name="Step 3: the cartridge carries its papers" id="{48e07672-4508-2859-5f7c-7a2503e7087d}">
           <p14:sldIdLst>
             <p14:sldId id="262"/>
             <p14:sldId id="263"/>
           </p14:sldIdLst>
         </p14:section>
-        <p14:section name="Step 4: the bundle" id="{c85a0407-edf1-238b-0ff8-3700944aec67}">
+        <p14:section name="Step 4: the bundle" id="{a931ed62-910a-df97-5a9c-ab6f6a4799f4}">
           <p14:sldIdLst>
             <p14:sldId id="264"/>
             <p14:sldId id="265"/>
           </p14:sldIdLst>
         </p14:section>
-        <p14:section name="Step 5: publication" id="{22914413-44d5-28e4-67a2-4abba40e0c1f}">
+        <p14:section name="Step 5: publication" id="{7d959c6d-cb3e-4e28-460c-c2c43205816e}">
           <p14:sldIdLst>
             <p14:sldId id="266"/>
           </p14:sldIdLst>
         </p14:section>
-        <p14:section name="Run it and test it" id="{44a7e041-6511-86a6-81f6-0b610cd2596d}">
+        <p14:section name="Run it and test it" id="{3e220e91-3a5a-caee-4cd0-4572bd0119aa}">
           <p14:sldIdLst>
             <p14:sldId id="267"/>
             <p14:sldId id="268"/>
@@ -167,7 +167,7 @@
             <p14:sldId id="271"/>
           </p14:sldIdLst>
         </p14:section>
-        <p14:section name="Exercises" id="{0e942a9a-cc93-585d-4938-3011aa1fd9bb}">
+        <p14:section name="Exercises" id="{72f31a81-43d3-cdd5-85a3-c7cba3b36f32}">
           <p14:sldIdLst>
             <p14:sldId id="272"/>
           </p14:sldIdLst>
@@ -578,7 +578,8 @@
               <a:rPr lang="en-US" dirty="0"/>
               <a:t>This is the code deck of Lecture 23. Where the lecture deck develops the concepts, this deck contains everything that is written and executed: each listing with its commentary, the complete program of the lecture, the output it is expected to produce, and the procedure for testing it on each of the three hosts. The two decks are meant to be read together: the concepts explain the code, and the code gives the concepts an observable consequence.
 Learning status: UNDERSTAND NOW, by the end of this lecture you explain it, trace it and apply it on your own; USE NOW, you follow and use the recipe today; how it works inside is explained later, or is not part of the course; UNDERSTAND LATER, recognise the name and what it is for; a later lecture explains it. A slide without a badge is context: a story, an example, a question, an exercise.
-Learning status of this lecture. UNDERSTAND NOW: packaging and publishing; the portable cartridge. USE NOW: the PRG32 tools (used, not studied, in this course). UNDERSTAND LATER: nothing. A slide without a badge is context: a story, an example, a question, an exercise.</a:t>
+Learning status of this lecture. UNDERSTAND NOW: packaging and publishing; the portable cartridge. USE NOW: the PRG32 tools (used, not studied, in this course). UNDERSTAND LATER: nothing. A slide without a badge is context: a story, an example, a question, an exercise.
+Roadmap. Today's outcomes: (1) build portable cartridges and check them; (2) package a bundle with metadata and publish it safely. Builds on: only what Lecture 01 set up. Next: Lecture 24, Beyond One Core: Superscalar RISC-V, HPC, GPUs and FPGAs.</a:t>
             </a:r>
             <a:endParaRPr lang="en-US" dirty="0"/>
           </a:p>
